--- a/INCREMENTO1/PPTS/PPt Primer incremento scrum++.pptx
+++ b/INCREMENTO1/PPTS/PPt Primer incremento scrum++.pptx
@@ -220,7 +220,7 @@
           <a:p>
             <a:fld id="{56824AA8-F311-4ABC-8748-4A852C5A6ECD}" type="datetimeFigureOut">
               <a:rPr lang="es-419" smtClean="0"/>
-              <a:t>18/8/2025</a:t>
+              <a:t>22/8/2025</a:t>
             </a:fld>
             <a:endParaRPr lang="es-419"/>
           </a:p>
@@ -1366,7 +1366,7 @@
           <a:p>
             <a:fld id="{5BCAD085-E8A6-8845-BD4E-CB4CCA059FC4}" type="datetimeFigureOut">
               <a:rPr lang="en-US" smtClean="0"/>
-              <a:t>8/18/2025</a:t>
+              <a:t>8/22/2025</a:t>
             </a:fld>
             <a:endParaRPr lang="en-US"/>
           </a:p>
@@ -1617,7 +1617,7 @@
           <a:p>
             <a:fld id="{5BCAD085-E8A6-8845-BD4E-CB4CCA059FC4}" type="datetimeFigureOut">
               <a:rPr lang="en-US" smtClean="0"/>
-              <a:t>8/18/2025</a:t>
+              <a:t>8/22/2025</a:t>
             </a:fld>
             <a:endParaRPr lang="en-US"/>
           </a:p>
@@ -1931,7 +1931,7 @@
           <a:p>
             <a:fld id="{5BCAD085-E8A6-8845-BD4E-CB4CCA059FC4}" type="datetimeFigureOut">
               <a:rPr lang="en-US" smtClean="0"/>
-              <a:t>8/18/2025</a:t>
+              <a:t>8/22/2025</a:t>
             </a:fld>
             <a:endParaRPr lang="en-US"/>
           </a:p>
@@ -2264,7 +2264,7 @@
           <a:p>
             <a:fld id="{5BCAD085-E8A6-8845-BD4E-CB4CCA059FC4}" type="datetimeFigureOut">
               <a:rPr lang="en-US" smtClean="0"/>
-              <a:t>8/18/2025</a:t>
+              <a:t>8/22/2025</a:t>
             </a:fld>
             <a:endParaRPr lang="en-US"/>
           </a:p>
@@ -2578,7 +2578,7 @@
           <a:p>
             <a:fld id="{5BCAD085-E8A6-8845-BD4E-CB4CCA059FC4}" type="datetimeFigureOut">
               <a:rPr lang="en-US" smtClean="0"/>
-              <a:t>8/18/2025</a:t>
+              <a:t>8/22/2025</a:t>
             </a:fld>
             <a:endParaRPr lang="en-US"/>
           </a:p>
@@ -2971,7 +2971,7 @@
           <a:p>
             <a:fld id="{5BCAD085-E8A6-8845-BD4E-CB4CCA059FC4}" type="datetimeFigureOut">
               <a:rPr lang="en-US" smtClean="0"/>
-              <a:t>8/18/2025</a:t>
+              <a:t>8/22/2025</a:t>
             </a:fld>
             <a:endParaRPr lang="en-US"/>
           </a:p>
@@ -3141,7 +3141,7 @@
           <a:p>
             <a:fld id="{5BCAD085-E8A6-8845-BD4E-CB4CCA059FC4}" type="datetimeFigureOut">
               <a:rPr lang="en-US" smtClean="0"/>
-              <a:t>8/18/2025</a:t>
+              <a:t>8/22/2025</a:t>
             </a:fld>
             <a:endParaRPr lang="en-US"/>
           </a:p>
@@ -3321,7 +3321,7 @@
           <a:p>
             <a:fld id="{5BCAD085-E8A6-8845-BD4E-CB4CCA059FC4}" type="datetimeFigureOut">
               <a:rPr lang="en-US" smtClean="0"/>
-              <a:t>8/18/2025</a:t>
+              <a:t>8/22/2025</a:t>
             </a:fld>
             <a:endParaRPr lang="en-US"/>
           </a:p>
@@ -3491,7 +3491,7 @@
           <a:p>
             <a:fld id="{5BCAD085-E8A6-8845-BD4E-CB4CCA059FC4}" type="datetimeFigureOut">
               <a:rPr lang="en-US" smtClean="0"/>
-              <a:t>8/18/2025</a:t>
+              <a:t>8/22/2025</a:t>
             </a:fld>
             <a:endParaRPr lang="en-US"/>
           </a:p>
@@ -3738,7 +3738,7 @@
           <a:p>
             <a:fld id="{5BCAD085-E8A6-8845-BD4E-CB4CCA059FC4}" type="datetimeFigureOut">
               <a:rPr lang="en-US" smtClean="0"/>
-              <a:t>8/18/2025</a:t>
+              <a:t>8/22/2025</a:t>
             </a:fld>
             <a:endParaRPr lang="en-US"/>
           </a:p>
@@ -4035,7 +4035,7 @@
           <a:p>
             <a:fld id="{5BCAD085-E8A6-8845-BD4E-CB4CCA059FC4}" type="datetimeFigureOut">
               <a:rPr lang="en-US" smtClean="0"/>
-              <a:t>8/18/2025</a:t>
+              <a:t>8/22/2025</a:t>
             </a:fld>
             <a:endParaRPr lang="en-US"/>
           </a:p>
@@ -4414,7 +4414,7 @@
           <a:p>
             <a:fld id="{5BCAD085-E8A6-8845-BD4E-CB4CCA059FC4}" type="datetimeFigureOut">
               <a:rPr lang="en-US" smtClean="0"/>
-              <a:t>8/18/2025</a:t>
+              <a:t>8/22/2025</a:t>
             </a:fld>
             <a:endParaRPr lang="en-US"/>
           </a:p>
@@ -4537,7 +4537,7 @@
           <a:p>
             <a:fld id="{5BCAD085-E8A6-8845-BD4E-CB4CCA059FC4}" type="datetimeFigureOut">
               <a:rPr lang="en-US" smtClean="0"/>
-              <a:t>8/18/2025</a:t>
+              <a:t>8/22/2025</a:t>
             </a:fld>
             <a:endParaRPr lang="en-US"/>
           </a:p>
@@ -4632,7 +4632,7 @@
           <a:p>
             <a:fld id="{5BCAD085-E8A6-8845-BD4E-CB4CCA059FC4}" type="datetimeFigureOut">
               <a:rPr lang="en-US" smtClean="0"/>
-              <a:t>8/18/2025</a:t>
+              <a:t>8/22/2025</a:t>
             </a:fld>
             <a:endParaRPr lang="en-US"/>
           </a:p>
@@ -4887,7 +4887,7 @@
           <a:p>
             <a:fld id="{5BCAD085-E8A6-8845-BD4E-CB4CCA059FC4}" type="datetimeFigureOut">
               <a:rPr lang="en-US" smtClean="0"/>
-              <a:t>8/18/2025</a:t>
+              <a:t>8/22/2025</a:t>
             </a:fld>
             <a:endParaRPr lang="en-US"/>
           </a:p>
@@ -5150,7 +5150,7 @@
           <a:p>
             <a:fld id="{5BCAD085-E8A6-8845-BD4E-CB4CCA059FC4}" type="datetimeFigureOut">
               <a:rPr lang="en-US" smtClean="0"/>
-              <a:t>8/18/2025</a:t>
+              <a:t>8/22/2025</a:t>
             </a:fld>
             <a:endParaRPr lang="en-US"/>
           </a:p>
@@ -5964,7 +5964,7 @@
           <a:p>
             <a:fld id="{5BCAD085-E8A6-8845-BD4E-CB4CCA059FC4}" type="datetimeFigureOut">
               <a:rPr lang="en-US" smtClean="0"/>
-              <a:t>8/18/2025</a:t>
+              <a:t>8/22/2025</a:t>
             </a:fld>
             <a:endParaRPr lang="en-US"/>
           </a:p>
@@ -6598,7 +6598,7 @@
                 <a:latin typeface="Times New Roman" panose="02020603050405020304" pitchFamily="18" charset="0"/>
                 <a:cs typeface="Times New Roman" panose="02020603050405020304" pitchFamily="18" charset="0"/>
               </a:rPr>
-              <a:t>Catalina Vidal Gallarda</a:t>
+              <a:t>Felipe Andrés Uribe del pino</a:t>
             </a:r>
           </a:p>
           <a:p>
@@ -6606,12 +6606,16 @@
               <a:buNone/>
             </a:pPr>
             <a:r>
-              <a:rPr lang="es-CL" sz="1100" dirty="0">
+              <a:rPr lang="es-CL" sz="1100">
                 <a:latin typeface="Times New Roman" panose="02020603050405020304" pitchFamily="18" charset="0"/>
                 <a:cs typeface="Times New Roman" panose="02020603050405020304" pitchFamily="18" charset="0"/>
               </a:rPr>
-              <a:t>Felipe Andrés Uribe del pino</a:t>
-            </a:r>
+              <a:t>Catalina Vidal Gallarda</a:t>
+            </a:r>
+            <a:endParaRPr lang="es-CL" sz="1100" dirty="0">
+              <a:latin typeface="Times New Roman" panose="02020603050405020304" pitchFamily="18" charset="0"/>
+              <a:cs typeface="Times New Roman" panose="02020603050405020304" pitchFamily="18" charset="0"/>
+            </a:endParaRPr>
           </a:p>
           <a:p>
             <a:pPr marL="0" indent="0">
